--- a/docs/SLIDE.pptx
+++ b/docs/SLIDE.pptx
@@ -264,6 +264,11 @@
       </a:defRPr>
     </a:lvl9pPr>
   </p:defaultTextStyle>
+  <p:extLst>
+    <p:ext uri="{EFAFB233-063F-42B5-8137-9DF3F51BA10A}">
+      <p15:sldGuideLst xmlns:p15="http://schemas.microsoft.com/office/powerpoint/2012/main"/>
+    </p:ext>
+  </p:extLst>
 </p:presentation>
 </file>
 
@@ -2001,51 +2006,2240 @@
           <a:lstStyle/>
           <a:p>
             <a:r>
-              <a:t>THỜI LƯỢNG GỢI Ý: 70 giây</a:t>
-            </a:r>
+              <a:rPr dirty="0"/>
+              <a:t>THỜI LƯỢNG GỢI Ý: 70 </a:t>
+            </a:r>
+            <a:r>
+              <a:rPr dirty="0" err="1"/>
+              <a:t>giây</a:t>
+            </a:r>
+            <a:endParaRPr dirty="0"/>
           </a:p>
           <a:p>
-            <a:endParaRPr/>
+            <a:endParaRPr dirty="0"/>
           </a:p>
           <a:p>
             <a:r>
-              <a:t>Phần 1, người trình bày: Thành viên 1.</a:t>
+              <a:rPr dirty="0" err="1"/>
+              <a:t>Phần</a:t>
+            </a:r>
+            <a:r>
+              <a:rPr dirty="0"/>
+              <a:t> 1, </a:t>
+            </a:r>
+            <a:r>
+              <a:rPr dirty="0" err="1"/>
+              <a:t>người</a:t>
+            </a:r>
+            <a:r>
+              <a:rPr dirty="0"/>
+              <a:t> </a:t>
+            </a:r>
+            <a:r>
+              <a:rPr dirty="0" err="1"/>
+              <a:t>trình</a:t>
+            </a:r>
+            <a:r>
+              <a:rPr dirty="0"/>
+              <a:t> </a:t>
+            </a:r>
+            <a:r>
+              <a:rPr dirty="0" err="1"/>
+              <a:t>bày</a:t>
+            </a:r>
+            <a:r>
+              <a:rPr dirty="0"/>
+              <a:t>: </a:t>
+            </a:r>
+            <a:r>
+              <a:rPr dirty="0" err="1"/>
+              <a:t>Thành</a:t>
+            </a:r>
+            <a:r>
+              <a:rPr dirty="0"/>
+              <a:t> </a:t>
+            </a:r>
+            <a:r>
+              <a:rPr dirty="0" err="1"/>
+              <a:t>viên</a:t>
+            </a:r>
+            <a:r>
+              <a:rPr dirty="0"/>
+              <a:t> 1.</a:t>
             </a:r>
           </a:p>
           <a:p>
-            <a:endParaRPr/>
+            <a:endParaRPr dirty="0"/>
           </a:p>
           <a:p>
             <a:r>
-              <a:t>Đây là sơ đồ khối một node, được lặp lại cho hai phòng. ESP8266 phù hợp nguyên mẫu nhờ Wi-Fi và các chân giao tiếp. MQ-2 cung cấp dấu hiệu khí hoặc khói, DS18B20 đo nhiệt độ, còn module hồng ngoại nhận biết tín hiệu quang liên quan đến ngọn lửa trong hướng quan sát. Đèn RGB và module còi phản hồi ngay tại phòng. DS18B20 cần điện trở kéo DATA lên 3,3 V. Mỗi nhánh RGB có điện trở 330 ôm riêng. Bộ 47 và 10 kiloôm là phương án chia áp AO của MQ-2 và phải đối chiếu giới hạn A0 của đúng board trước khi đấu. Nguồn USB 5 V cấp cho node không có nghĩa mọi chân tín hiệu chịu 5 V. Xanh biểu thị dữ liệu hợp lệ, đỏ nhấp nháy và còi biểu thị nguy hiểm, vàng báo lỗi được phát hiện. Nếu lỗi và nguy hiểm đồng thời xuất hiện, cảnh báo nguy hiểm có ưu tiên. Sơ đồ chỉ mô tả các khối và hướng tín hiệu. Đường nguồn/GND và chân GPIO chi tiết được trình bày trong báo cáo. MQ-2 lấy nguồn 5 V phù hợp, không lấy nguồn bộ gia nhiệt từ chân GPIO. Cáp Type-C dùng nạp code, Serial và nguồn; MQTT truyền qua Wi-Fi. Breadboard và Dupont dùng để lắp thử. Lỗi của các module giá rẻ không phải lúc nào cũng tự phát hiện được.</a:t>
+              <a:rPr dirty="0" err="1"/>
+              <a:t>Đây</a:t>
+            </a:r>
+            <a:r>
+              <a:rPr dirty="0"/>
+              <a:t> </a:t>
+            </a:r>
+            <a:r>
+              <a:rPr dirty="0" err="1"/>
+              <a:t>là</a:t>
+            </a:r>
+            <a:r>
+              <a:rPr dirty="0"/>
+              <a:t> </a:t>
+            </a:r>
+            <a:r>
+              <a:rPr dirty="0" err="1"/>
+              <a:t>sơ</a:t>
+            </a:r>
+            <a:r>
+              <a:rPr dirty="0"/>
+              <a:t> </a:t>
+            </a:r>
+            <a:r>
+              <a:rPr dirty="0" err="1"/>
+              <a:t>đồ</a:t>
+            </a:r>
+            <a:r>
+              <a:rPr dirty="0"/>
+              <a:t> </a:t>
+            </a:r>
+            <a:r>
+              <a:rPr dirty="0" err="1"/>
+              <a:t>khối</a:t>
+            </a:r>
+            <a:r>
+              <a:rPr dirty="0"/>
+              <a:t> </a:t>
+            </a:r>
+            <a:r>
+              <a:rPr dirty="0" err="1"/>
+              <a:t>một</a:t>
+            </a:r>
+            <a:r>
+              <a:rPr dirty="0"/>
+              <a:t> node, </a:t>
+            </a:r>
+            <a:r>
+              <a:rPr dirty="0" err="1"/>
+              <a:t>được</a:t>
+            </a:r>
+            <a:r>
+              <a:rPr dirty="0"/>
+              <a:t> </a:t>
+            </a:r>
+            <a:r>
+              <a:rPr dirty="0" err="1"/>
+              <a:t>lặp</a:t>
+            </a:r>
+            <a:r>
+              <a:rPr dirty="0"/>
+              <a:t> </a:t>
+            </a:r>
+            <a:r>
+              <a:rPr dirty="0" err="1"/>
+              <a:t>lại</a:t>
+            </a:r>
+            <a:r>
+              <a:rPr dirty="0"/>
+              <a:t> </a:t>
+            </a:r>
+            <a:r>
+              <a:rPr dirty="0" err="1"/>
+              <a:t>cho</a:t>
+            </a:r>
+            <a:r>
+              <a:rPr dirty="0"/>
+              <a:t> </a:t>
+            </a:r>
+            <a:r>
+              <a:rPr dirty="0" err="1"/>
+              <a:t>hai</a:t>
+            </a:r>
+            <a:r>
+              <a:rPr dirty="0"/>
+              <a:t> </a:t>
+            </a:r>
+            <a:r>
+              <a:rPr dirty="0" err="1"/>
+              <a:t>phòng</a:t>
+            </a:r>
+            <a:r>
+              <a:rPr dirty="0"/>
+              <a:t>. ESP8266 </a:t>
+            </a:r>
+            <a:r>
+              <a:rPr dirty="0" err="1"/>
+              <a:t>phù</a:t>
+            </a:r>
+            <a:r>
+              <a:rPr dirty="0"/>
+              <a:t> </a:t>
+            </a:r>
+            <a:r>
+              <a:rPr dirty="0" err="1"/>
+              <a:t>hợp</a:t>
+            </a:r>
+            <a:r>
+              <a:rPr dirty="0"/>
+              <a:t> </a:t>
+            </a:r>
+            <a:r>
+              <a:rPr dirty="0" err="1"/>
+              <a:t>nguyên</a:t>
+            </a:r>
+            <a:r>
+              <a:rPr dirty="0"/>
+              <a:t> </a:t>
+            </a:r>
+            <a:r>
+              <a:rPr dirty="0" err="1"/>
+              <a:t>mẫu</a:t>
+            </a:r>
+            <a:r>
+              <a:rPr dirty="0"/>
+              <a:t> </a:t>
+            </a:r>
+            <a:r>
+              <a:rPr dirty="0" err="1"/>
+              <a:t>nhờ</a:t>
+            </a:r>
+            <a:r>
+              <a:rPr dirty="0"/>
+              <a:t> Wi-Fi </a:t>
+            </a:r>
+            <a:r>
+              <a:rPr dirty="0" err="1"/>
+              <a:t>và</a:t>
+            </a:r>
+            <a:r>
+              <a:rPr dirty="0"/>
+              <a:t> </a:t>
+            </a:r>
+            <a:r>
+              <a:rPr dirty="0" err="1"/>
+              <a:t>các</a:t>
+            </a:r>
+            <a:r>
+              <a:rPr dirty="0"/>
+              <a:t> </a:t>
+            </a:r>
+            <a:r>
+              <a:rPr dirty="0" err="1"/>
+              <a:t>chân</a:t>
+            </a:r>
+            <a:r>
+              <a:rPr dirty="0"/>
+              <a:t> </a:t>
+            </a:r>
+            <a:r>
+              <a:rPr dirty="0" err="1"/>
+              <a:t>giao</a:t>
+            </a:r>
+            <a:r>
+              <a:rPr dirty="0"/>
+              <a:t> </a:t>
+            </a:r>
+            <a:r>
+              <a:rPr dirty="0" err="1"/>
+              <a:t>tiếp</a:t>
+            </a:r>
+            <a:r>
+              <a:rPr dirty="0"/>
+              <a:t>. MQ-2 </a:t>
+            </a:r>
+            <a:r>
+              <a:rPr dirty="0" err="1"/>
+              <a:t>cung</a:t>
+            </a:r>
+            <a:r>
+              <a:rPr dirty="0"/>
+              <a:t> </a:t>
+            </a:r>
+            <a:r>
+              <a:rPr dirty="0" err="1"/>
+              <a:t>cấp</a:t>
+            </a:r>
+            <a:r>
+              <a:rPr dirty="0"/>
+              <a:t> </a:t>
+            </a:r>
+            <a:r>
+              <a:rPr dirty="0" err="1"/>
+              <a:t>dấu</a:t>
+            </a:r>
+            <a:r>
+              <a:rPr dirty="0"/>
+              <a:t> </a:t>
+            </a:r>
+            <a:r>
+              <a:rPr dirty="0" err="1"/>
+              <a:t>hiệu</a:t>
+            </a:r>
+            <a:r>
+              <a:rPr dirty="0"/>
+              <a:t> </a:t>
+            </a:r>
+            <a:r>
+              <a:rPr dirty="0" err="1"/>
+              <a:t>khí</a:t>
+            </a:r>
+            <a:r>
+              <a:rPr dirty="0"/>
+              <a:t> </a:t>
+            </a:r>
+            <a:r>
+              <a:rPr dirty="0" err="1"/>
+              <a:t>hoặc</a:t>
+            </a:r>
+            <a:r>
+              <a:rPr dirty="0"/>
+              <a:t> </a:t>
+            </a:r>
+            <a:r>
+              <a:rPr dirty="0" err="1"/>
+              <a:t>khói</a:t>
+            </a:r>
+            <a:r>
+              <a:rPr dirty="0"/>
+              <a:t>, DS18B20 </a:t>
+            </a:r>
+            <a:r>
+              <a:rPr dirty="0" err="1"/>
+              <a:t>đo</a:t>
+            </a:r>
+            <a:r>
+              <a:rPr dirty="0"/>
+              <a:t> </a:t>
+            </a:r>
+            <a:r>
+              <a:rPr dirty="0" err="1"/>
+              <a:t>nhiệt</a:t>
+            </a:r>
+            <a:r>
+              <a:rPr dirty="0"/>
+              <a:t> </a:t>
+            </a:r>
+            <a:r>
+              <a:rPr dirty="0" err="1"/>
+              <a:t>độ</a:t>
+            </a:r>
+            <a:r>
+              <a:rPr dirty="0"/>
+              <a:t>, </a:t>
+            </a:r>
+            <a:r>
+              <a:rPr dirty="0" err="1"/>
+              <a:t>còn</a:t>
+            </a:r>
+            <a:r>
+              <a:rPr dirty="0"/>
+              <a:t> module </a:t>
+            </a:r>
+            <a:r>
+              <a:rPr dirty="0" err="1"/>
+              <a:t>hồng</a:t>
+            </a:r>
+            <a:r>
+              <a:rPr dirty="0"/>
+              <a:t> </a:t>
+            </a:r>
+            <a:r>
+              <a:rPr dirty="0" err="1"/>
+              <a:t>ngoại</a:t>
+            </a:r>
+            <a:r>
+              <a:rPr dirty="0"/>
+              <a:t> </a:t>
+            </a:r>
+            <a:r>
+              <a:rPr dirty="0" err="1"/>
+              <a:t>nhận</a:t>
+            </a:r>
+            <a:r>
+              <a:rPr dirty="0"/>
+              <a:t> </a:t>
+            </a:r>
+            <a:r>
+              <a:rPr dirty="0" err="1"/>
+              <a:t>biết</a:t>
+            </a:r>
+            <a:r>
+              <a:rPr dirty="0"/>
+              <a:t> </a:t>
+            </a:r>
+            <a:r>
+              <a:rPr dirty="0" err="1"/>
+              <a:t>tín</a:t>
+            </a:r>
+            <a:r>
+              <a:rPr dirty="0"/>
+              <a:t> </a:t>
+            </a:r>
+            <a:r>
+              <a:rPr dirty="0" err="1"/>
+              <a:t>hiệu</a:t>
+            </a:r>
+            <a:r>
+              <a:rPr dirty="0"/>
+              <a:t> </a:t>
+            </a:r>
+            <a:r>
+              <a:rPr dirty="0" err="1"/>
+              <a:t>quang</a:t>
+            </a:r>
+            <a:r>
+              <a:rPr dirty="0"/>
+              <a:t> </a:t>
+            </a:r>
+            <a:r>
+              <a:rPr dirty="0" err="1"/>
+              <a:t>liên</a:t>
+            </a:r>
+            <a:r>
+              <a:rPr dirty="0"/>
+              <a:t> </a:t>
+            </a:r>
+            <a:r>
+              <a:rPr dirty="0" err="1"/>
+              <a:t>quan</a:t>
+            </a:r>
+            <a:r>
+              <a:rPr dirty="0"/>
+              <a:t> </a:t>
+            </a:r>
+            <a:r>
+              <a:rPr dirty="0" err="1"/>
+              <a:t>đến</a:t>
+            </a:r>
+            <a:r>
+              <a:rPr dirty="0"/>
+              <a:t> </a:t>
+            </a:r>
+            <a:r>
+              <a:rPr dirty="0" err="1"/>
+              <a:t>ngọn</a:t>
+            </a:r>
+            <a:r>
+              <a:rPr dirty="0"/>
+              <a:t> </a:t>
+            </a:r>
+            <a:r>
+              <a:rPr dirty="0" err="1"/>
+              <a:t>lửa</a:t>
+            </a:r>
+            <a:r>
+              <a:rPr dirty="0"/>
+              <a:t> </a:t>
+            </a:r>
+            <a:r>
+              <a:rPr dirty="0" err="1"/>
+              <a:t>trong</a:t>
+            </a:r>
+            <a:r>
+              <a:rPr dirty="0"/>
+              <a:t> </a:t>
+            </a:r>
+            <a:r>
+              <a:rPr dirty="0" err="1"/>
+              <a:t>hướng</a:t>
+            </a:r>
+            <a:r>
+              <a:rPr dirty="0"/>
+              <a:t> </a:t>
+            </a:r>
+            <a:r>
+              <a:rPr dirty="0" err="1"/>
+              <a:t>quan</a:t>
+            </a:r>
+            <a:r>
+              <a:rPr dirty="0"/>
+              <a:t> </a:t>
+            </a:r>
+            <a:r>
+              <a:rPr dirty="0" err="1"/>
+              <a:t>sát</a:t>
+            </a:r>
+            <a:r>
+              <a:rPr dirty="0"/>
+              <a:t>. </a:t>
+            </a:r>
+            <a:r>
+              <a:rPr dirty="0" err="1"/>
+              <a:t>Đèn</a:t>
+            </a:r>
+            <a:r>
+              <a:rPr dirty="0"/>
+              <a:t> RGB </a:t>
+            </a:r>
+            <a:r>
+              <a:rPr dirty="0" err="1"/>
+              <a:t>và</a:t>
+            </a:r>
+            <a:r>
+              <a:rPr dirty="0"/>
+              <a:t> module </a:t>
+            </a:r>
+            <a:r>
+              <a:rPr dirty="0" err="1"/>
+              <a:t>còi</a:t>
+            </a:r>
+            <a:r>
+              <a:rPr dirty="0"/>
+              <a:t> </a:t>
+            </a:r>
+            <a:r>
+              <a:rPr dirty="0" err="1"/>
+              <a:t>phản</a:t>
+            </a:r>
+            <a:r>
+              <a:rPr dirty="0"/>
+              <a:t> </a:t>
+            </a:r>
+            <a:r>
+              <a:rPr dirty="0" err="1"/>
+              <a:t>hồi</a:t>
+            </a:r>
+            <a:r>
+              <a:rPr dirty="0"/>
+              <a:t> </a:t>
+            </a:r>
+            <a:r>
+              <a:rPr dirty="0" err="1"/>
+              <a:t>ngay</a:t>
+            </a:r>
+            <a:r>
+              <a:rPr dirty="0"/>
+              <a:t> </a:t>
+            </a:r>
+            <a:r>
+              <a:rPr dirty="0" err="1"/>
+              <a:t>tại</a:t>
+            </a:r>
+            <a:r>
+              <a:rPr dirty="0"/>
+              <a:t> </a:t>
+            </a:r>
+            <a:r>
+              <a:rPr dirty="0" err="1"/>
+              <a:t>phòng</a:t>
+            </a:r>
+            <a:r>
+              <a:rPr dirty="0"/>
+              <a:t>. DS18B20 </a:t>
+            </a:r>
+            <a:r>
+              <a:rPr dirty="0" err="1"/>
+              <a:t>cần</a:t>
+            </a:r>
+            <a:r>
+              <a:rPr dirty="0"/>
+              <a:t> </a:t>
+            </a:r>
+            <a:r>
+              <a:rPr dirty="0" err="1"/>
+              <a:t>điện</a:t>
+            </a:r>
+            <a:r>
+              <a:rPr dirty="0"/>
+              <a:t> </a:t>
+            </a:r>
+            <a:r>
+              <a:rPr dirty="0" err="1"/>
+              <a:t>trở</a:t>
+            </a:r>
+            <a:r>
+              <a:rPr dirty="0"/>
+              <a:t> </a:t>
+            </a:r>
+            <a:r>
+              <a:rPr dirty="0" err="1"/>
+              <a:t>kéo</a:t>
+            </a:r>
+            <a:r>
+              <a:rPr dirty="0"/>
+              <a:t> DATA </a:t>
+            </a:r>
+            <a:r>
+              <a:rPr dirty="0" err="1"/>
+              <a:t>lên</a:t>
+            </a:r>
+            <a:r>
+              <a:rPr dirty="0"/>
+              <a:t> 3,3 V. </a:t>
+            </a:r>
+            <a:r>
+              <a:rPr dirty="0" err="1"/>
+              <a:t>Mỗi</a:t>
+            </a:r>
+            <a:r>
+              <a:rPr dirty="0"/>
+              <a:t> </a:t>
+            </a:r>
+            <a:r>
+              <a:rPr dirty="0" err="1"/>
+              <a:t>nhánh</a:t>
+            </a:r>
+            <a:r>
+              <a:rPr dirty="0"/>
+              <a:t> RGB </a:t>
+            </a:r>
+            <a:r>
+              <a:rPr dirty="0" err="1"/>
+              <a:t>có</a:t>
+            </a:r>
+            <a:r>
+              <a:rPr dirty="0"/>
+              <a:t> </a:t>
+            </a:r>
+            <a:r>
+              <a:rPr dirty="0" err="1"/>
+              <a:t>điện</a:t>
+            </a:r>
+            <a:r>
+              <a:rPr dirty="0"/>
+              <a:t> </a:t>
+            </a:r>
+            <a:r>
+              <a:rPr dirty="0" err="1"/>
+              <a:t>trở</a:t>
+            </a:r>
+            <a:r>
+              <a:rPr dirty="0"/>
+              <a:t> 330 </a:t>
+            </a:r>
+            <a:r>
+              <a:rPr dirty="0" err="1"/>
+              <a:t>ôm</a:t>
+            </a:r>
+            <a:r>
+              <a:rPr dirty="0"/>
+              <a:t> </a:t>
+            </a:r>
+            <a:r>
+              <a:rPr dirty="0" err="1"/>
+              <a:t>riêng</a:t>
+            </a:r>
+            <a:r>
+              <a:rPr dirty="0"/>
+              <a:t>. </a:t>
+            </a:r>
+            <a:r>
+              <a:rPr dirty="0" err="1"/>
+              <a:t>Bộ</a:t>
+            </a:r>
+            <a:r>
+              <a:rPr dirty="0"/>
+              <a:t> 47 </a:t>
+            </a:r>
+            <a:r>
+              <a:rPr dirty="0" err="1"/>
+              <a:t>và</a:t>
+            </a:r>
+            <a:r>
+              <a:rPr dirty="0"/>
+              <a:t> 10 </a:t>
+            </a:r>
+            <a:r>
+              <a:rPr dirty="0" err="1"/>
+              <a:t>kiloôm</a:t>
+            </a:r>
+            <a:r>
+              <a:rPr dirty="0"/>
+              <a:t> </a:t>
+            </a:r>
+            <a:r>
+              <a:rPr dirty="0" err="1"/>
+              <a:t>là</a:t>
+            </a:r>
+            <a:r>
+              <a:rPr dirty="0"/>
+              <a:t> </a:t>
+            </a:r>
+            <a:r>
+              <a:rPr dirty="0" err="1"/>
+              <a:t>phương</a:t>
+            </a:r>
+            <a:r>
+              <a:rPr dirty="0"/>
+              <a:t> </a:t>
+            </a:r>
+            <a:r>
+              <a:rPr dirty="0" err="1"/>
+              <a:t>án</a:t>
+            </a:r>
+            <a:r>
+              <a:rPr dirty="0"/>
+              <a:t> chia </a:t>
+            </a:r>
+            <a:r>
+              <a:rPr dirty="0" err="1"/>
+              <a:t>áp</a:t>
+            </a:r>
+            <a:r>
+              <a:rPr dirty="0"/>
+              <a:t> AO </a:t>
+            </a:r>
+            <a:r>
+              <a:rPr dirty="0" err="1"/>
+              <a:t>của</a:t>
+            </a:r>
+            <a:r>
+              <a:rPr dirty="0"/>
+              <a:t> MQ-2 </a:t>
+            </a:r>
+            <a:r>
+              <a:rPr dirty="0" err="1"/>
+              <a:t>và</a:t>
+            </a:r>
+            <a:r>
+              <a:rPr dirty="0"/>
+              <a:t> </a:t>
+            </a:r>
+            <a:r>
+              <a:rPr dirty="0" err="1"/>
+              <a:t>phải</a:t>
+            </a:r>
+            <a:r>
+              <a:rPr dirty="0"/>
+              <a:t> </a:t>
+            </a:r>
+            <a:r>
+              <a:rPr dirty="0" err="1"/>
+              <a:t>đối</a:t>
+            </a:r>
+            <a:r>
+              <a:rPr dirty="0"/>
+              <a:t> </a:t>
+            </a:r>
+            <a:r>
+              <a:rPr dirty="0" err="1"/>
+              <a:t>chiếu</a:t>
+            </a:r>
+            <a:r>
+              <a:rPr dirty="0"/>
+              <a:t> </a:t>
+            </a:r>
+            <a:r>
+              <a:rPr dirty="0" err="1"/>
+              <a:t>giới</a:t>
+            </a:r>
+            <a:r>
+              <a:rPr dirty="0"/>
+              <a:t> </a:t>
+            </a:r>
+            <a:r>
+              <a:rPr dirty="0" err="1"/>
+              <a:t>hạn</a:t>
+            </a:r>
+            <a:r>
+              <a:rPr dirty="0"/>
+              <a:t> A0 </a:t>
+            </a:r>
+            <a:r>
+              <a:rPr dirty="0" err="1"/>
+              <a:t>của</a:t>
+            </a:r>
+            <a:r>
+              <a:rPr dirty="0"/>
+              <a:t> </a:t>
+            </a:r>
+            <a:r>
+              <a:rPr dirty="0" err="1"/>
+              <a:t>đúng</a:t>
+            </a:r>
+            <a:r>
+              <a:rPr dirty="0"/>
+              <a:t> board </a:t>
+            </a:r>
+            <a:r>
+              <a:rPr dirty="0" err="1"/>
+              <a:t>trước</a:t>
+            </a:r>
+            <a:r>
+              <a:rPr dirty="0"/>
+              <a:t> </a:t>
+            </a:r>
+            <a:r>
+              <a:rPr dirty="0" err="1"/>
+              <a:t>khi</a:t>
+            </a:r>
+            <a:r>
+              <a:rPr dirty="0"/>
+              <a:t> </a:t>
+            </a:r>
+            <a:r>
+              <a:rPr dirty="0" err="1"/>
+              <a:t>đấu</a:t>
+            </a:r>
+            <a:r>
+              <a:rPr dirty="0"/>
+              <a:t>. </a:t>
+            </a:r>
+            <a:r>
+              <a:rPr dirty="0" err="1"/>
+              <a:t>Nguồn</a:t>
+            </a:r>
+            <a:r>
+              <a:rPr dirty="0"/>
+              <a:t> USB 5 V </a:t>
+            </a:r>
+            <a:r>
+              <a:rPr dirty="0" err="1"/>
+              <a:t>cấp</a:t>
+            </a:r>
+            <a:r>
+              <a:rPr dirty="0"/>
+              <a:t> </a:t>
+            </a:r>
+            <a:r>
+              <a:rPr dirty="0" err="1"/>
+              <a:t>cho</a:t>
+            </a:r>
+            <a:r>
+              <a:rPr dirty="0"/>
+              <a:t> node </a:t>
+            </a:r>
+            <a:r>
+              <a:rPr dirty="0" err="1"/>
+              <a:t>không</a:t>
+            </a:r>
+            <a:r>
+              <a:rPr dirty="0"/>
+              <a:t> </a:t>
+            </a:r>
+            <a:r>
+              <a:rPr dirty="0" err="1"/>
+              <a:t>có</a:t>
+            </a:r>
+            <a:r>
+              <a:rPr dirty="0"/>
+              <a:t> </a:t>
+            </a:r>
+            <a:r>
+              <a:rPr dirty="0" err="1"/>
+              <a:t>nghĩa</a:t>
+            </a:r>
+            <a:r>
+              <a:rPr dirty="0"/>
+              <a:t> </a:t>
+            </a:r>
+            <a:r>
+              <a:rPr dirty="0" err="1"/>
+              <a:t>mọi</a:t>
+            </a:r>
+            <a:r>
+              <a:rPr dirty="0"/>
+              <a:t> </a:t>
+            </a:r>
+            <a:r>
+              <a:rPr dirty="0" err="1"/>
+              <a:t>chân</a:t>
+            </a:r>
+            <a:r>
+              <a:rPr dirty="0"/>
+              <a:t> </a:t>
+            </a:r>
+            <a:r>
+              <a:rPr dirty="0" err="1"/>
+              <a:t>tín</a:t>
+            </a:r>
+            <a:r>
+              <a:rPr dirty="0"/>
+              <a:t> </a:t>
+            </a:r>
+            <a:r>
+              <a:rPr dirty="0" err="1"/>
+              <a:t>hiệu</a:t>
+            </a:r>
+            <a:r>
+              <a:rPr dirty="0"/>
+              <a:t> </a:t>
+            </a:r>
+            <a:r>
+              <a:rPr dirty="0" err="1"/>
+              <a:t>chịu</a:t>
+            </a:r>
+            <a:r>
+              <a:rPr dirty="0"/>
+              <a:t> 5 V. </a:t>
+            </a:r>
+            <a:r>
+              <a:rPr dirty="0" err="1"/>
+              <a:t>Xanh</a:t>
+            </a:r>
+            <a:r>
+              <a:rPr dirty="0"/>
+              <a:t> </a:t>
+            </a:r>
+            <a:r>
+              <a:rPr dirty="0" err="1"/>
+              <a:t>biểu</a:t>
+            </a:r>
+            <a:r>
+              <a:rPr dirty="0"/>
+              <a:t> </a:t>
+            </a:r>
+            <a:r>
+              <a:rPr dirty="0" err="1"/>
+              <a:t>thị</a:t>
+            </a:r>
+            <a:r>
+              <a:rPr dirty="0"/>
+              <a:t> </a:t>
+            </a:r>
+            <a:r>
+              <a:rPr dirty="0" err="1"/>
+              <a:t>dữ</a:t>
+            </a:r>
+            <a:r>
+              <a:rPr dirty="0"/>
+              <a:t> </a:t>
+            </a:r>
+            <a:r>
+              <a:rPr dirty="0" err="1"/>
+              <a:t>liệu</a:t>
+            </a:r>
+            <a:r>
+              <a:rPr dirty="0"/>
+              <a:t> </a:t>
+            </a:r>
+            <a:r>
+              <a:rPr dirty="0" err="1"/>
+              <a:t>hợp</a:t>
+            </a:r>
+            <a:r>
+              <a:rPr dirty="0"/>
+              <a:t> </a:t>
+            </a:r>
+            <a:r>
+              <a:rPr dirty="0" err="1"/>
+              <a:t>lệ</a:t>
+            </a:r>
+            <a:r>
+              <a:rPr dirty="0"/>
+              <a:t>, </a:t>
+            </a:r>
+            <a:r>
+              <a:rPr dirty="0" err="1"/>
+              <a:t>đỏ</a:t>
+            </a:r>
+            <a:r>
+              <a:rPr dirty="0"/>
+              <a:t> </a:t>
+            </a:r>
+            <a:r>
+              <a:rPr dirty="0" err="1"/>
+              <a:t>nhấp</a:t>
+            </a:r>
+            <a:r>
+              <a:rPr dirty="0"/>
+              <a:t> </a:t>
+            </a:r>
+            <a:r>
+              <a:rPr dirty="0" err="1"/>
+              <a:t>nháy</a:t>
+            </a:r>
+            <a:r>
+              <a:rPr dirty="0"/>
+              <a:t> </a:t>
+            </a:r>
+            <a:r>
+              <a:rPr dirty="0" err="1"/>
+              <a:t>và</a:t>
+            </a:r>
+            <a:r>
+              <a:rPr dirty="0"/>
+              <a:t> </a:t>
+            </a:r>
+            <a:r>
+              <a:rPr dirty="0" err="1"/>
+              <a:t>còi</a:t>
+            </a:r>
+            <a:r>
+              <a:rPr dirty="0"/>
+              <a:t> </a:t>
+            </a:r>
+            <a:r>
+              <a:rPr dirty="0" err="1"/>
+              <a:t>biểu</a:t>
+            </a:r>
+            <a:r>
+              <a:rPr dirty="0"/>
+              <a:t> </a:t>
+            </a:r>
+            <a:r>
+              <a:rPr dirty="0" err="1"/>
+              <a:t>thị</a:t>
+            </a:r>
+            <a:r>
+              <a:rPr dirty="0"/>
+              <a:t> </a:t>
+            </a:r>
+            <a:r>
+              <a:rPr dirty="0" err="1"/>
+              <a:t>nguy</a:t>
+            </a:r>
+            <a:r>
+              <a:rPr dirty="0"/>
+              <a:t> </a:t>
+            </a:r>
+            <a:r>
+              <a:rPr dirty="0" err="1"/>
+              <a:t>hiểm</a:t>
+            </a:r>
+            <a:r>
+              <a:rPr dirty="0"/>
+              <a:t>, </a:t>
+            </a:r>
+            <a:r>
+              <a:rPr dirty="0" err="1"/>
+              <a:t>vàng</a:t>
+            </a:r>
+            <a:r>
+              <a:rPr dirty="0"/>
+              <a:t> </a:t>
+            </a:r>
+            <a:r>
+              <a:rPr dirty="0" err="1"/>
+              <a:t>báo</a:t>
+            </a:r>
+            <a:r>
+              <a:rPr dirty="0"/>
+              <a:t> </a:t>
+            </a:r>
+            <a:r>
+              <a:rPr dirty="0" err="1"/>
+              <a:t>lỗi</a:t>
+            </a:r>
+            <a:r>
+              <a:rPr dirty="0"/>
+              <a:t> </a:t>
+            </a:r>
+            <a:r>
+              <a:rPr dirty="0" err="1"/>
+              <a:t>được</a:t>
+            </a:r>
+            <a:r>
+              <a:rPr dirty="0"/>
+              <a:t> </a:t>
+            </a:r>
+            <a:r>
+              <a:rPr dirty="0" err="1"/>
+              <a:t>phát</a:t>
+            </a:r>
+            <a:r>
+              <a:rPr dirty="0"/>
+              <a:t> </a:t>
+            </a:r>
+            <a:r>
+              <a:rPr dirty="0" err="1"/>
+              <a:t>hiện</a:t>
+            </a:r>
+            <a:r>
+              <a:rPr dirty="0"/>
+              <a:t>. </a:t>
+            </a:r>
+            <a:r>
+              <a:rPr dirty="0" err="1"/>
+              <a:t>Nếu</a:t>
+            </a:r>
+            <a:r>
+              <a:rPr dirty="0"/>
+              <a:t> </a:t>
+            </a:r>
+            <a:r>
+              <a:rPr dirty="0" err="1"/>
+              <a:t>lỗi</a:t>
+            </a:r>
+            <a:r>
+              <a:rPr dirty="0"/>
+              <a:t> </a:t>
+            </a:r>
+            <a:r>
+              <a:rPr dirty="0" err="1"/>
+              <a:t>và</a:t>
+            </a:r>
+            <a:r>
+              <a:rPr dirty="0"/>
+              <a:t> </a:t>
+            </a:r>
+            <a:r>
+              <a:rPr dirty="0" err="1"/>
+              <a:t>nguy</a:t>
+            </a:r>
+            <a:r>
+              <a:rPr dirty="0"/>
+              <a:t> </a:t>
+            </a:r>
+            <a:r>
+              <a:rPr dirty="0" err="1"/>
+              <a:t>hiểm</a:t>
+            </a:r>
+            <a:r>
+              <a:rPr dirty="0"/>
+              <a:t> </a:t>
+            </a:r>
+            <a:r>
+              <a:rPr dirty="0" err="1"/>
+              <a:t>đồng</a:t>
+            </a:r>
+            <a:r>
+              <a:rPr dirty="0"/>
+              <a:t> </a:t>
+            </a:r>
+            <a:r>
+              <a:rPr dirty="0" err="1"/>
+              <a:t>thời</a:t>
+            </a:r>
+            <a:r>
+              <a:rPr dirty="0"/>
+              <a:t> </a:t>
+            </a:r>
+            <a:r>
+              <a:rPr dirty="0" err="1"/>
+              <a:t>xuất</a:t>
+            </a:r>
+            <a:r>
+              <a:rPr dirty="0"/>
+              <a:t> </a:t>
+            </a:r>
+            <a:r>
+              <a:rPr dirty="0" err="1"/>
+              <a:t>hiện</a:t>
+            </a:r>
+            <a:r>
+              <a:rPr dirty="0"/>
+              <a:t>, </a:t>
+            </a:r>
+            <a:r>
+              <a:rPr dirty="0" err="1"/>
+              <a:t>cảnh</a:t>
+            </a:r>
+            <a:r>
+              <a:rPr dirty="0"/>
+              <a:t> </a:t>
+            </a:r>
+            <a:r>
+              <a:rPr dirty="0" err="1"/>
+              <a:t>báo</a:t>
+            </a:r>
+            <a:r>
+              <a:rPr dirty="0"/>
+              <a:t> </a:t>
+            </a:r>
+            <a:r>
+              <a:rPr dirty="0" err="1"/>
+              <a:t>nguy</a:t>
+            </a:r>
+            <a:r>
+              <a:rPr dirty="0"/>
+              <a:t> </a:t>
+            </a:r>
+            <a:r>
+              <a:rPr dirty="0" err="1"/>
+              <a:t>hiểm</a:t>
+            </a:r>
+            <a:r>
+              <a:rPr dirty="0"/>
+              <a:t> </a:t>
+            </a:r>
+            <a:r>
+              <a:rPr dirty="0" err="1"/>
+              <a:t>có</a:t>
+            </a:r>
+            <a:r>
+              <a:rPr dirty="0"/>
+              <a:t> </a:t>
+            </a:r>
+            <a:r>
+              <a:rPr dirty="0" err="1"/>
+              <a:t>ưu</a:t>
+            </a:r>
+            <a:r>
+              <a:rPr dirty="0"/>
+              <a:t> </a:t>
+            </a:r>
+            <a:r>
+              <a:rPr dirty="0" err="1"/>
+              <a:t>tiên</a:t>
+            </a:r>
+            <a:r>
+              <a:rPr dirty="0"/>
+              <a:t>. </a:t>
+            </a:r>
+            <a:r>
+              <a:rPr dirty="0" err="1"/>
+              <a:t>Sơ</a:t>
+            </a:r>
+            <a:r>
+              <a:rPr dirty="0"/>
+              <a:t> </a:t>
+            </a:r>
+            <a:r>
+              <a:rPr dirty="0" err="1"/>
+              <a:t>đồ</a:t>
+            </a:r>
+            <a:r>
+              <a:rPr dirty="0"/>
+              <a:t> </a:t>
+            </a:r>
+            <a:r>
+              <a:rPr dirty="0" err="1"/>
+              <a:t>chỉ</a:t>
+            </a:r>
+            <a:r>
+              <a:rPr dirty="0"/>
+              <a:t> </a:t>
+            </a:r>
+            <a:r>
+              <a:rPr dirty="0" err="1"/>
+              <a:t>mô</a:t>
+            </a:r>
+            <a:r>
+              <a:rPr dirty="0"/>
+              <a:t> </a:t>
+            </a:r>
+            <a:r>
+              <a:rPr dirty="0" err="1"/>
+              <a:t>tả</a:t>
+            </a:r>
+            <a:r>
+              <a:rPr dirty="0"/>
+              <a:t> </a:t>
+            </a:r>
+            <a:r>
+              <a:rPr dirty="0" err="1"/>
+              <a:t>các</a:t>
+            </a:r>
+            <a:r>
+              <a:rPr dirty="0"/>
+              <a:t> </a:t>
+            </a:r>
+            <a:r>
+              <a:rPr dirty="0" err="1"/>
+              <a:t>khối</a:t>
+            </a:r>
+            <a:r>
+              <a:rPr dirty="0"/>
+              <a:t> </a:t>
+            </a:r>
+            <a:r>
+              <a:rPr dirty="0" err="1"/>
+              <a:t>và</a:t>
+            </a:r>
+            <a:r>
+              <a:rPr dirty="0"/>
+              <a:t> </a:t>
+            </a:r>
+            <a:r>
+              <a:rPr dirty="0" err="1"/>
+              <a:t>hướng</a:t>
+            </a:r>
+            <a:r>
+              <a:rPr dirty="0"/>
+              <a:t> </a:t>
+            </a:r>
+            <a:r>
+              <a:rPr dirty="0" err="1"/>
+              <a:t>tín</a:t>
+            </a:r>
+            <a:r>
+              <a:rPr dirty="0"/>
+              <a:t> </a:t>
+            </a:r>
+            <a:r>
+              <a:rPr dirty="0" err="1"/>
+              <a:t>hiệu</a:t>
+            </a:r>
+            <a:r>
+              <a:rPr dirty="0"/>
+              <a:t>. </a:t>
+            </a:r>
+            <a:r>
+              <a:rPr dirty="0" err="1"/>
+              <a:t>Đường</a:t>
+            </a:r>
+            <a:r>
+              <a:rPr dirty="0"/>
+              <a:t> </a:t>
+            </a:r>
+            <a:r>
+              <a:rPr dirty="0" err="1"/>
+              <a:t>nguồn</a:t>
+            </a:r>
+            <a:r>
+              <a:rPr dirty="0"/>
+              <a:t>/GND </a:t>
+            </a:r>
+            <a:r>
+              <a:rPr dirty="0" err="1"/>
+              <a:t>và</a:t>
+            </a:r>
+            <a:r>
+              <a:rPr dirty="0"/>
+              <a:t> </a:t>
+            </a:r>
+            <a:r>
+              <a:rPr dirty="0" err="1"/>
+              <a:t>chân</a:t>
+            </a:r>
+            <a:r>
+              <a:rPr dirty="0"/>
+              <a:t> GPIO chi </a:t>
+            </a:r>
+            <a:r>
+              <a:rPr dirty="0" err="1"/>
+              <a:t>tiết</a:t>
+            </a:r>
+            <a:r>
+              <a:rPr dirty="0"/>
+              <a:t> </a:t>
+            </a:r>
+            <a:r>
+              <a:rPr dirty="0" err="1"/>
+              <a:t>được</a:t>
+            </a:r>
+            <a:r>
+              <a:rPr dirty="0"/>
+              <a:t> </a:t>
+            </a:r>
+            <a:r>
+              <a:rPr dirty="0" err="1"/>
+              <a:t>trình</a:t>
+            </a:r>
+            <a:r>
+              <a:rPr dirty="0"/>
+              <a:t> </a:t>
+            </a:r>
+            <a:r>
+              <a:rPr dirty="0" err="1"/>
+              <a:t>bày</a:t>
+            </a:r>
+            <a:r>
+              <a:rPr dirty="0"/>
+              <a:t> </a:t>
+            </a:r>
+            <a:r>
+              <a:rPr dirty="0" err="1"/>
+              <a:t>trong</a:t>
+            </a:r>
+            <a:r>
+              <a:rPr dirty="0"/>
+              <a:t> </a:t>
+            </a:r>
+            <a:r>
+              <a:rPr dirty="0" err="1"/>
+              <a:t>báo</a:t>
+            </a:r>
+            <a:r>
+              <a:rPr dirty="0"/>
+              <a:t> </a:t>
+            </a:r>
+            <a:r>
+              <a:rPr dirty="0" err="1"/>
+              <a:t>cáo</a:t>
+            </a:r>
+            <a:r>
+              <a:rPr dirty="0"/>
+              <a:t>. MQ-2 </a:t>
+            </a:r>
+            <a:r>
+              <a:rPr dirty="0" err="1"/>
+              <a:t>lấy</a:t>
+            </a:r>
+            <a:r>
+              <a:rPr dirty="0"/>
+              <a:t> </a:t>
+            </a:r>
+            <a:r>
+              <a:rPr dirty="0" err="1"/>
+              <a:t>nguồn</a:t>
+            </a:r>
+            <a:r>
+              <a:rPr dirty="0"/>
+              <a:t> 5 V </a:t>
+            </a:r>
+            <a:r>
+              <a:rPr dirty="0" err="1"/>
+              <a:t>phù</a:t>
+            </a:r>
+            <a:r>
+              <a:rPr dirty="0"/>
+              <a:t> </a:t>
+            </a:r>
+            <a:r>
+              <a:rPr dirty="0" err="1"/>
+              <a:t>hợp</a:t>
+            </a:r>
+            <a:r>
+              <a:rPr dirty="0"/>
+              <a:t>, </a:t>
+            </a:r>
+            <a:r>
+              <a:rPr dirty="0" err="1"/>
+              <a:t>không</a:t>
+            </a:r>
+            <a:r>
+              <a:rPr dirty="0"/>
+              <a:t> </a:t>
+            </a:r>
+            <a:r>
+              <a:rPr dirty="0" err="1"/>
+              <a:t>lấy</a:t>
+            </a:r>
+            <a:r>
+              <a:rPr dirty="0"/>
+              <a:t> </a:t>
+            </a:r>
+            <a:r>
+              <a:rPr dirty="0" err="1"/>
+              <a:t>nguồn</a:t>
+            </a:r>
+            <a:r>
+              <a:rPr dirty="0"/>
+              <a:t> </a:t>
+            </a:r>
+            <a:r>
+              <a:rPr dirty="0" err="1"/>
+              <a:t>bộ</a:t>
+            </a:r>
+            <a:r>
+              <a:rPr dirty="0"/>
+              <a:t> </a:t>
+            </a:r>
+            <a:r>
+              <a:rPr dirty="0" err="1"/>
+              <a:t>gia</a:t>
+            </a:r>
+            <a:r>
+              <a:rPr dirty="0"/>
+              <a:t> </a:t>
+            </a:r>
+            <a:r>
+              <a:rPr dirty="0" err="1"/>
+              <a:t>nhiệt</a:t>
+            </a:r>
+            <a:r>
+              <a:rPr dirty="0"/>
+              <a:t> </a:t>
+            </a:r>
+            <a:r>
+              <a:rPr dirty="0" err="1"/>
+              <a:t>từ</a:t>
+            </a:r>
+            <a:r>
+              <a:rPr dirty="0"/>
+              <a:t> </a:t>
+            </a:r>
+            <a:r>
+              <a:rPr dirty="0" err="1"/>
+              <a:t>chân</a:t>
+            </a:r>
+            <a:r>
+              <a:rPr dirty="0"/>
+              <a:t> GPIO. </a:t>
+            </a:r>
+            <a:r>
+              <a:rPr dirty="0" err="1"/>
+              <a:t>Cáp</a:t>
+            </a:r>
+            <a:r>
+              <a:rPr dirty="0"/>
+              <a:t> Type-C </a:t>
+            </a:r>
+            <a:r>
+              <a:rPr dirty="0" err="1"/>
+              <a:t>dùng</a:t>
+            </a:r>
+            <a:r>
+              <a:rPr dirty="0"/>
+              <a:t> </a:t>
+            </a:r>
+            <a:r>
+              <a:rPr dirty="0" err="1"/>
+              <a:t>nạp</a:t>
+            </a:r>
+            <a:r>
+              <a:rPr dirty="0"/>
+              <a:t> code, Serial </a:t>
+            </a:r>
+            <a:r>
+              <a:rPr dirty="0" err="1"/>
+              <a:t>và</a:t>
+            </a:r>
+            <a:r>
+              <a:rPr dirty="0"/>
+              <a:t> </a:t>
+            </a:r>
+            <a:r>
+              <a:rPr dirty="0" err="1"/>
+              <a:t>nguồn</a:t>
+            </a:r>
+            <a:r>
+              <a:rPr dirty="0"/>
+              <a:t>; MQTT </a:t>
+            </a:r>
+            <a:r>
+              <a:rPr dirty="0" err="1"/>
+              <a:t>truyền</a:t>
+            </a:r>
+            <a:r>
+              <a:rPr dirty="0"/>
+              <a:t> qua Wi-Fi. Breadboard </a:t>
+            </a:r>
+            <a:r>
+              <a:rPr dirty="0" err="1"/>
+              <a:t>và</a:t>
+            </a:r>
+            <a:r>
+              <a:rPr dirty="0"/>
+              <a:t> Dupont </a:t>
+            </a:r>
+            <a:r>
+              <a:rPr dirty="0" err="1"/>
+              <a:t>dùng</a:t>
+            </a:r>
+            <a:r>
+              <a:rPr dirty="0"/>
+              <a:t> </a:t>
+            </a:r>
+            <a:r>
+              <a:rPr dirty="0" err="1"/>
+              <a:t>để</a:t>
+            </a:r>
+            <a:r>
+              <a:rPr dirty="0"/>
+              <a:t> </a:t>
+            </a:r>
+            <a:r>
+              <a:rPr dirty="0" err="1"/>
+              <a:t>lắp</a:t>
+            </a:r>
+            <a:r>
+              <a:rPr dirty="0"/>
+              <a:t> </a:t>
+            </a:r>
+            <a:r>
+              <a:rPr dirty="0" err="1"/>
+              <a:t>thử</a:t>
+            </a:r>
+            <a:r>
+              <a:rPr dirty="0"/>
+              <a:t>. </a:t>
+            </a:r>
+            <a:r>
+              <a:rPr dirty="0" err="1"/>
+              <a:t>Lỗi</a:t>
+            </a:r>
+            <a:r>
+              <a:rPr dirty="0"/>
+              <a:t> </a:t>
+            </a:r>
+            <a:r>
+              <a:rPr dirty="0" err="1"/>
+              <a:t>của</a:t>
+            </a:r>
+            <a:r>
+              <a:rPr dirty="0"/>
+              <a:t> </a:t>
+            </a:r>
+            <a:r>
+              <a:rPr dirty="0" err="1"/>
+              <a:t>các</a:t>
+            </a:r>
+            <a:r>
+              <a:rPr dirty="0"/>
+              <a:t> module </a:t>
+            </a:r>
+            <a:r>
+              <a:rPr dirty="0" err="1"/>
+              <a:t>giá</a:t>
+            </a:r>
+            <a:r>
+              <a:rPr dirty="0"/>
+              <a:t> </a:t>
+            </a:r>
+            <a:r>
+              <a:rPr dirty="0" err="1"/>
+              <a:t>rẻ</a:t>
+            </a:r>
+            <a:r>
+              <a:rPr dirty="0"/>
+              <a:t> </a:t>
+            </a:r>
+            <a:r>
+              <a:rPr dirty="0" err="1"/>
+              <a:t>không</a:t>
+            </a:r>
+            <a:r>
+              <a:rPr dirty="0"/>
+              <a:t> </a:t>
+            </a:r>
+            <a:r>
+              <a:rPr dirty="0" err="1"/>
+              <a:t>phải</a:t>
+            </a:r>
+            <a:r>
+              <a:rPr dirty="0"/>
+              <a:t> </a:t>
+            </a:r>
+            <a:r>
+              <a:rPr dirty="0" err="1"/>
+              <a:t>lúc</a:t>
+            </a:r>
+            <a:r>
+              <a:rPr dirty="0"/>
+              <a:t> </a:t>
+            </a:r>
+            <a:r>
+              <a:rPr dirty="0" err="1"/>
+              <a:t>nào</a:t>
+            </a:r>
+            <a:r>
+              <a:rPr dirty="0"/>
+              <a:t> </a:t>
+            </a:r>
+            <a:r>
+              <a:rPr dirty="0" err="1"/>
+              <a:t>cũng</a:t>
+            </a:r>
+            <a:r>
+              <a:rPr dirty="0"/>
+              <a:t> </a:t>
+            </a:r>
+            <a:r>
+              <a:rPr dirty="0" err="1"/>
+              <a:t>tự</a:t>
+            </a:r>
+            <a:r>
+              <a:rPr dirty="0"/>
+              <a:t> </a:t>
+            </a:r>
+            <a:r>
+              <a:rPr dirty="0" err="1"/>
+              <a:t>phát</a:t>
+            </a:r>
+            <a:r>
+              <a:rPr dirty="0"/>
+              <a:t> </a:t>
+            </a:r>
+            <a:r>
+              <a:rPr dirty="0" err="1"/>
+              <a:t>hiện</a:t>
+            </a:r>
+            <a:r>
+              <a:rPr dirty="0"/>
+              <a:t> </a:t>
+            </a:r>
+            <a:r>
+              <a:rPr dirty="0" err="1"/>
+              <a:t>được</a:t>
+            </a:r>
+            <a:r>
+              <a:rPr dirty="0"/>
+              <a:t>.</a:t>
             </a:r>
           </a:p>
           <a:p>
-            <a:endParaRPr/>
+            <a:endParaRPr dirty="0"/>
           </a:p>
           <a:p>
             <a:r>
-              <a:t>Nguồn nội dung: C:\Users\ThinkPad\Documents\demo.docx — Thiết bị và sơ đồ phần cứng.</a:t>
+              <a:rPr dirty="0" err="1"/>
+              <a:t>Nguồn</a:t>
+            </a:r>
+            <a:r>
+              <a:rPr dirty="0"/>
+              <a:t> </a:t>
+            </a:r>
+            <a:r>
+              <a:rPr dirty="0" err="1"/>
+              <a:t>nội</a:t>
+            </a:r>
+            <a:r>
+              <a:rPr dirty="0"/>
+              <a:t> dung: C:\Users\ThinkPad\Documents\demo.docx — </a:t>
+            </a:r>
+            <a:r>
+              <a:rPr dirty="0" err="1"/>
+              <a:t>Thiết</a:t>
+            </a:r>
+            <a:r>
+              <a:rPr dirty="0"/>
+              <a:t> </a:t>
+            </a:r>
+            <a:r>
+              <a:rPr dirty="0" err="1"/>
+              <a:t>bị</a:t>
+            </a:r>
+            <a:r>
+              <a:rPr dirty="0"/>
+              <a:t> </a:t>
+            </a:r>
+            <a:r>
+              <a:rPr dirty="0" err="1"/>
+              <a:t>và</a:t>
+            </a:r>
+            <a:r>
+              <a:rPr dirty="0"/>
+              <a:t> </a:t>
+            </a:r>
+            <a:r>
+              <a:rPr dirty="0" err="1"/>
+              <a:t>sơ</a:t>
+            </a:r>
+            <a:r>
+              <a:rPr dirty="0"/>
+              <a:t> </a:t>
+            </a:r>
+            <a:r>
+              <a:rPr dirty="0" err="1"/>
+              <a:t>đồ</a:t>
+            </a:r>
+            <a:r>
+              <a:rPr dirty="0"/>
+              <a:t> </a:t>
+            </a:r>
+            <a:r>
+              <a:rPr dirty="0" err="1"/>
+              <a:t>phần</a:t>
+            </a:r>
+            <a:r>
+              <a:rPr dirty="0"/>
+              <a:t> </a:t>
+            </a:r>
+            <a:r>
+              <a:rPr dirty="0" err="1"/>
+              <a:t>cứng</a:t>
+            </a:r>
+            <a:r>
+              <a:rPr dirty="0"/>
+              <a:t>.</a:t>
             </a:r>
           </a:p>
           <a:p>
             <a:r>
-              <a:t>Mẫu trình bày: D:/Dowload-web/[SLIDE]_Đào Bá Khánh_ĐATN_Thiết kế, triển khai hệ thống IOT phát hiện và cảnh báo mất trộm, tai nạn xe máy.pptx.</a:t>
+              <a:rPr dirty="0" err="1"/>
+              <a:t>Mẫu</a:t>
+            </a:r>
+            <a:r>
+              <a:rPr dirty="0"/>
+              <a:t> </a:t>
+            </a:r>
+            <a:r>
+              <a:rPr dirty="0" err="1"/>
+              <a:t>trình</a:t>
+            </a:r>
+            <a:r>
+              <a:rPr dirty="0"/>
+              <a:t> </a:t>
+            </a:r>
+            <a:r>
+              <a:rPr dirty="0" err="1"/>
+              <a:t>bày</a:t>
+            </a:r>
+            <a:r>
+              <a:rPr dirty="0"/>
+              <a:t>: D:/Dowload-web/[SLIDE]_Đào Bá </a:t>
+            </a:r>
+            <a:r>
+              <a:rPr dirty="0" err="1"/>
+              <a:t>Khánh_ĐATN_Thie</a:t>
+            </a:r>
+            <a:r>
+              <a:rPr dirty="0"/>
+              <a:t>̂́t </a:t>
+            </a:r>
+            <a:r>
+              <a:rPr dirty="0" err="1"/>
+              <a:t>ke</a:t>
+            </a:r>
+            <a:r>
+              <a:rPr dirty="0"/>
+              <a:t>̂́, </a:t>
+            </a:r>
+            <a:r>
+              <a:rPr dirty="0" err="1"/>
+              <a:t>trie</a:t>
+            </a:r>
+            <a:r>
+              <a:rPr dirty="0"/>
+              <a:t>̂̉n </a:t>
+            </a:r>
+            <a:r>
+              <a:rPr dirty="0" err="1"/>
+              <a:t>khai</a:t>
+            </a:r>
+            <a:r>
+              <a:rPr dirty="0"/>
+              <a:t> hệ </a:t>
+            </a:r>
+            <a:r>
+              <a:rPr dirty="0" err="1"/>
+              <a:t>tho</a:t>
+            </a:r>
+            <a:r>
+              <a:rPr dirty="0"/>
+              <a:t>̂́ng IOT </a:t>
+            </a:r>
+            <a:r>
+              <a:rPr dirty="0" err="1"/>
+              <a:t>phát</a:t>
+            </a:r>
+            <a:r>
+              <a:rPr dirty="0"/>
+              <a:t> hiện </a:t>
+            </a:r>
+            <a:r>
+              <a:rPr dirty="0" err="1"/>
+              <a:t>va</a:t>
+            </a:r>
+            <a:r>
+              <a:rPr dirty="0"/>
+              <a:t>̀ </a:t>
+            </a:r>
+            <a:r>
+              <a:rPr dirty="0" err="1"/>
+              <a:t>cảnh</a:t>
+            </a:r>
+            <a:r>
+              <a:rPr dirty="0"/>
+              <a:t> </a:t>
+            </a:r>
+            <a:r>
+              <a:rPr dirty="0" err="1"/>
+              <a:t>báo</a:t>
+            </a:r>
+            <a:r>
+              <a:rPr dirty="0"/>
+              <a:t> mất trộm, tai </a:t>
+            </a:r>
+            <a:r>
+              <a:rPr dirty="0" err="1"/>
+              <a:t>nạn</a:t>
+            </a:r>
+            <a:r>
+              <a:rPr dirty="0"/>
+              <a:t> </a:t>
+            </a:r>
+            <a:r>
+              <a:rPr dirty="0" err="1"/>
+              <a:t>xe</a:t>
+            </a:r>
+            <a:r>
+              <a:rPr dirty="0"/>
+              <a:t> máy.pptx.</a:t>
             </a:r>
           </a:p>
           <a:p>
             <a:r>
-              <a:t>Báo cáo phân tích và thiết kế, không coi sơ đồ đề xuất là bằng chứng kiểm thử hoàn chỉnh.</a:t>
+              <a:rPr dirty="0" err="1"/>
+              <a:t>Báo</a:t>
+            </a:r>
+            <a:r>
+              <a:rPr dirty="0"/>
+              <a:t> </a:t>
+            </a:r>
+            <a:r>
+              <a:rPr dirty="0" err="1"/>
+              <a:t>cáo</a:t>
+            </a:r>
+            <a:r>
+              <a:rPr dirty="0"/>
+              <a:t> </a:t>
+            </a:r>
+            <a:r>
+              <a:rPr dirty="0" err="1"/>
+              <a:t>phân</a:t>
+            </a:r>
+            <a:r>
+              <a:rPr dirty="0"/>
+              <a:t> </a:t>
+            </a:r>
+            <a:r>
+              <a:rPr dirty="0" err="1"/>
+              <a:t>tích</a:t>
+            </a:r>
+            <a:r>
+              <a:rPr dirty="0"/>
+              <a:t> </a:t>
+            </a:r>
+            <a:r>
+              <a:rPr dirty="0" err="1"/>
+              <a:t>và</a:t>
+            </a:r>
+            <a:r>
+              <a:rPr dirty="0"/>
+              <a:t> </a:t>
+            </a:r>
+            <a:r>
+              <a:rPr dirty="0" err="1"/>
+              <a:t>thiết</a:t>
+            </a:r>
+            <a:r>
+              <a:rPr dirty="0"/>
+              <a:t> </a:t>
+            </a:r>
+            <a:r>
+              <a:rPr dirty="0" err="1"/>
+              <a:t>kế</a:t>
+            </a:r>
+            <a:r>
+              <a:rPr dirty="0"/>
+              <a:t>, </a:t>
+            </a:r>
+            <a:r>
+              <a:rPr dirty="0" err="1"/>
+              <a:t>không</a:t>
+            </a:r>
+            <a:r>
+              <a:rPr dirty="0"/>
+              <a:t> </a:t>
+            </a:r>
+            <a:r>
+              <a:rPr dirty="0" err="1"/>
+              <a:t>coi</a:t>
+            </a:r>
+            <a:r>
+              <a:rPr dirty="0"/>
+              <a:t> </a:t>
+            </a:r>
+            <a:r>
+              <a:rPr dirty="0" err="1"/>
+              <a:t>sơ</a:t>
+            </a:r>
+            <a:r>
+              <a:rPr dirty="0"/>
+              <a:t> </a:t>
+            </a:r>
+            <a:r>
+              <a:rPr dirty="0" err="1"/>
+              <a:t>đồ</a:t>
+            </a:r>
+            <a:r>
+              <a:rPr dirty="0"/>
+              <a:t> </a:t>
+            </a:r>
+            <a:r>
+              <a:rPr dirty="0" err="1"/>
+              <a:t>đề</a:t>
+            </a:r>
+            <a:r>
+              <a:rPr dirty="0"/>
+              <a:t> </a:t>
+            </a:r>
+            <a:r>
+              <a:rPr dirty="0" err="1"/>
+              <a:t>xuất</a:t>
+            </a:r>
+            <a:r>
+              <a:rPr dirty="0"/>
+              <a:t> </a:t>
+            </a:r>
+            <a:r>
+              <a:rPr dirty="0" err="1"/>
+              <a:t>là</a:t>
+            </a:r>
+            <a:r>
+              <a:rPr dirty="0"/>
+              <a:t> </a:t>
+            </a:r>
+            <a:r>
+              <a:rPr dirty="0" err="1"/>
+              <a:t>bằng</a:t>
+            </a:r>
+            <a:r>
+              <a:rPr dirty="0"/>
+              <a:t> </a:t>
+            </a:r>
+            <a:r>
+              <a:rPr dirty="0" err="1"/>
+              <a:t>chứng</a:t>
+            </a:r>
+            <a:r>
+              <a:rPr dirty="0"/>
+              <a:t> </a:t>
+            </a:r>
+            <a:r>
+              <a:rPr dirty="0" err="1"/>
+              <a:t>kiểm</a:t>
+            </a:r>
+            <a:r>
+              <a:rPr dirty="0"/>
+              <a:t> </a:t>
+            </a:r>
+            <a:r>
+              <a:rPr dirty="0" err="1"/>
+              <a:t>thử</a:t>
+            </a:r>
+            <a:r>
+              <a:rPr dirty="0"/>
+              <a:t> </a:t>
+            </a:r>
+            <a:r>
+              <a:rPr dirty="0" err="1"/>
+              <a:t>hoàn</a:t>
+            </a:r>
+            <a:r>
+              <a:rPr dirty="0"/>
+              <a:t> </a:t>
+            </a:r>
+            <a:r>
+              <a:rPr dirty="0" err="1"/>
+              <a:t>chỉnh</a:t>
+            </a:r>
+            <a:r>
+              <a:rPr dirty="0"/>
+              <a:t>.</a:t>
             </a:r>
           </a:p>
           <a:p>
             <a:r>
-              <a:t>Các điều chỉnh Telegram và phạm vi quyền theo trao đổi chốt thiết kế với nhóm ngày 27/10/2026.</a:t>
+              <a:rPr dirty="0" err="1"/>
+              <a:t>Các</a:t>
+            </a:r>
+            <a:r>
+              <a:rPr dirty="0"/>
+              <a:t> </a:t>
+            </a:r>
+            <a:r>
+              <a:rPr dirty="0" err="1"/>
+              <a:t>điều</a:t>
+            </a:r>
+            <a:r>
+              <a:rPr dirty="0"/>
+              <a:t> </a:t>
+            </a:r>
+            <a:r>
+              <a:rPr dirty="0" err="1"/>
+              <a:t>chỉnh</a:t>
+            </a:r>
+            <a:r>
+              <a:rPr dirty="0"/>
+              <a:t> Telegram </a:t>
+            </a:r>
+            <a:r>
+              <a:rPr dirty="0" err="1"/>
+              <a:t>và</a:t>
+            </a:r>
+            <a:r>
+              <a:rPr dirty="0"/>
+              <a:t> </a:t>
+            </a:r>
+            <a:r>
+              <a:rPr dirty="0" err="1"/>
+              <a:t>phạm</a:t>
+            </a:r>
+            <a:r>
+              <a:rPr dirty="0"/>
+              <a:t> vi </a:t>
+            </a:r>
+            <a:r>
+              <a:rPr dirty="0" err="1"/>
+              <a:t>quyền</a:t>
+            </a:r>
+            <a:r>
+              <a:rPr dirty="0"/>
+              <a:t> </a:t>
+            </a:r>
+            <a:r>
+              <a:rPr dirty="0" err="1"/>
+              <a:t>theo</a:t>
+            </a:r>
+            <a:r>
+              <a:rPr dirty="0"/>
+              <a:t> </a:t>
+            </a:r>
+            <a:r>
+              <a:rPr dirty="0" err="1"/>
+              <a:t>trao</a:t>
+            </a:r>
+            <a:r>
+              <a:rPr dirty="0"/>
+              <a:t> </a:t>
+            </a:r>
+            <a:r>
+              <a:rPr dirty="0" err="1"/>
+              <a:t>đổi</a:t>
+            </a:r>
+            <a:r>
+              <a:rPr dirty="0"/>
+              <a:t> </a:t>
+            </a:r>
+            <a:r>
+              <a:rPr dirty="0" err="1"/>
+              <a:t>chốt</a:t>
+            </a:r>
+            <a:r>
+              <a:rPr dirty="0"/>
+              <a:t> </a:t>
+            </a:r>
+            <a:r>
+              <a:rPr dirty="0" err="1"/>
+              <a:t>thiết</a:t>
+            </a:r>
+            <a:r>
+              <a:rPr dirty="0"/>
+              <a:t> </a:t>
+            </a:r>
+            <a:r>
+              <a:rPr dirty="0" err="1"/>
+              <a:t>kế</a:t>
+            </a:r>
+            <a:r>
+              <a:rPr dirty="0"/>
+              <a:t> </a:t>
+            </a:r>
+            <a:r>
+              <a:rPr dirty="0" err="1"/>
+              <a:t>với</a:t>
+            </a:r>
+            <a:r>
+              <a:rPr dirty="0"/>
+              <a:t> </a:t>
+            </a:r>
+            <a:r>
+              <a:rPr dirty="0" err="1"/>
+              <a:t>nhóm</a:t>
+            </a:r>
+            <a:r>
+              <a:rPr dirty="0"/>
+              <a:t> </a:t>
+            </a:r>
+            <a:r>
+              <a:rPr dirty="0" err="1"/>
+              <a:t>ngày</a:t>
+            </a:r>
+            <a:r>
+              <a:rPr dirty="0"/>
+              <a:t> 27/10/2026.</a:t>
             </a:r>
           </a:p>
           <a:p>
             <a:r>
-              <a:t>Hai node có cùng cấu hình phần cứng, mỗi node theo dõi một phòng. Nguồn 5 V–2 A cấp cho từng node.</a:t>
+              <a:rPr dirty="0"/>
+              <a:t>Hai node </a:t>
+            </a:r>
+            <a:r>
+              <a:rPr dirty="0" err="1"/>
+              <a:t>có</a:t>
+            </a:r>
+            <a:r>
+              <a:rPr dirty="0"/>
+              <a:t> </a:t>
+            </a:r>
+            <a:r>
+              <a:rPr dirty="0" err="1"/>
+              <a:t>cùng</a:t>
+            </a:r>
+            <a:r>
+              <a:rPr dirty="0"/>
+              <a:t> </a:t>
+            </a:r>
+            <a:r>
+              <a:rPr dirty="0" err="1"/>
+              <a:t>cấu</a:t>
+            </a:r>
+            <a:r>
+              <a:rPr dirty="0"/>
+              <a:t> </a:t>
+            </a:r>
+            <a:r>
+              <a:rPr dirty="0" err="1"/>
+              <a:t>hình</a:t>
+            </a:r>
+            <a:r>
+              <a:rPr dirty="0"/>
+              <a:t> </a:t>
+            </a:r>
+            <a:r>
+              <a:rPr dirty="0" err="1"/>
+              <a:t>phần</a:t>
+            </a:r>
+            <a:r>
+              <a:rPr dirty="0"/>
+              <a:t> </a:t>
+            </a:r>
+            <a:r>
+              <a:rPr dirty="0" err="1"/>
+              <a:t>cứng</a:t>
+            </a:r>
+            <a:r>
+              <a:rPr dirty="0"/>
+              <a:t>, </a:t>
+            </a:r>
+            <a:r>
+              <a:rPr dirty="0" err="1"/>
+              <a:t>mỗi</a:t>
+            </a:r>
+            <a:r>
+              <a:rPr dirty="0"/>
+              <a:t> node </a:t>
+            </a:r>
+            <a:r>
+              <a:rPr dirty="0" err="1"/>
+              <a:t>theo</a:t>
+            </a:r>
+            <a:r>
+              <a:rPr dirty="0"/>
+              <a:t> </a:t>
+            </a:r>
+            <a:r>
+              <a:rPr dirty="0" err="1"/>
+              <a:t>dõi</a:t>
+            </a:r>
+            <a:r>
+              <a:rPr dirty="0"/>
+              <a:t> </a:t>
+            </a:r>
+            <a:r>
+              <a:rPr dirty="0" err="1"/>
+              <a:t>một</a:t>
+            </a:r>
+            <a:r>
+              <a:rPr dirty="0"/>
+              <a:t> </a:t>
+            </a:r>
+            <a:r>
+              <a:rPr dirty="0" err="1"/>
+              <a:t>phòng</a:t>
+            </a:r>
+            <a:r>
+              <a:rPr dirty="0"/>
+              <a:t>. </a:t>
+            </a:r>
+            <a:r>
+              <a:rPr dirty="0" err="1"/>
+              <a:t>Nguồn</a:t>
+            </a:r>
+            <a:r>
+              <a:rPr dirty="0"/>
+              <a:t> 5 V–2 A </a:t>
+            </a:r>
+            <a:r>
+              <a:rPr dirty="0" err="1"/>
+              <a:t>cấp</a:t>
+            </a:r>
+            <a:r>
+              <a:rPr dirty="0"/>
+              <a:t> </a:t>
+            </a:r>
+            <a:r>
+              <a:rPr dirty="0" err="1"/>
+              <a:t>cho</a:t>
+            </a:r>
+            <a:r>
+              <a:rPr dirty="0"/>
+              <a:t> </a:t>
+            </a:r>
+            <a:r>
+              <a:rPr dirty="0" err="1"/>
+              <a:t>từng</a:t>
+            </a:r>
+            <a:r>
+              <a:rPr dirty="0"/>
+              <a:t> node.</a:t>
             </a:r>
           </a:p>
         </p:txBody>
@@ -4693,7 +6887,7 @@
               <a:rPr lang="en-US" dirty="0" err="1">
                 <a:latin typeface="Arial" panose="020B0604020202020204" pitchFamily="34" charset="0"/>
               </a:rPr>
-              <a:t>Vỹ</a:t>
+              <a:t>Vĩ</a:t>
             </a:r>
             <a:endParaRPr lang="en-US" dirty="0">
               <a:latin typeface="Arial" panose="020B0604020202020204" pitchFamily="34" charset="0"/>
@@ -16125,6 +18319,28 @@
               </a:defRPr>
             </a:pPr>
             <a:r>
+              <a:rPr sz="1725" b="1" dirty="0">
+                <a:solidFill>
+                  <a:srgbClr val="003366"/>
+                </a:solidFill>
+                <a:latin typeface="Lato"/>
+                <a:ea typeface="Lato"/>
+                <a:cs typeface="Lato"/>
+              </a:rPr>
+              <a:t>Chia </a:t>
+            </a:r>
+            <a:r>
+              <a:rPr sz="1725" b="1" dirty="0" err="1">
+                <a:solidFill>
+                  <a:srgbClr val="003366"/>
+                </a:solidFill>
+                <a:latin typeface="Lato"/>
+                <a:ea typeface="Lato"/>
+                <a:cs typeface="Lato"/>
+              </a:rPr>
+              <a:t>áp</a:t>
+            </a:r>
+            <a:r>
               <a:rPr sz="1725" b="1">
                 <a:solidFill>
                   <a:srgbClr val="003366"/>
@@ -16133,8 +18349,16 @@
                 <a:ea typeface="Lato"/>
                 <a:cs typeface="Lato"/>
               </a:rPr>
-              <a:t>Chia áp AO*</a:t>
-            </a:r>
+              <a:t> AO</a:t>
+            </a:r>
+            <a:endParaRPr sz="1725" b="1" dirty="0">
+              <a:solidFill>
+                <a:srgbClr val="003366"/>
+              </a:solidFill>
+              <a:latin typeface="Lato"/>
+              <a:ea typeface="Lato"/>
+              <a:cs typeface="Lato"/>
+            </a:endParaRPr>
           </a:p>
           <a:p>
             <a:pPr algn="ctr">
@@ -16149,7 +18373,7 @@
               </a:defRPr>
             </a:pPr>
             <a:r>
-              <a:rPr sz="1725" b="1">
+              <a:rPr sz="1725" b="1" dirty="0">
                 <a:solidFill>
                   <a:srgbClr val="003366"/>
                 </a:solidFill>
@@ -16157,8 +18381,49 @@
                 <a:ea typeface="Lato"/>
                 <a:cs typeface="Lato"/>
               </a:rPr>
-              <a:t>47 kΩ + 10 kΩ</a:t>
-            </a:r>
+              <a:t>47 </a:t>
+            </a:r>
+            <a:r>
+              <a:rPr sz="1725" b="1" dirty="0" err="1">
+                <a:solidFill>
+                  <a:srgbClr val="003366"/>
+                </a:solidFill>
+                <a:latin typeface="Lato"/>
+                <a:ea typeface="Lato"/>
+                <a:cs typeface="Lato"/>
+              </a:rPr>
+              <a:t>kΩ</a:t>
+            </a:r>
+            <a:r>
+              <a:rPr sz="1725" b="1" dirty="0">
+                <a:solidFill>
+                  <a:srgbClr val="003366"/>
+                </a:solidFill>
+                <a:latin typeface="Lato"/>
+                <a:ea typeface="Lato"/>
+                <a:cs typeface="Lato"/>
+              </a:rPr>
+              <a:t> + 10 </a:t>
+            </a:r>
+            <a:r>
+              <a:rPr sz="1725" b="1" dirty="0" err="1">
+                <a:solidFill>
+                  <a:srgbClr val="003366"/>
+                </a:solidFill>
+                <a:latin typeface="Lato"/>
+                <a:ea typeface="Lato"/>
+                <a:cs typeface="Lato"/>
+              </a:rPr>
+              <a:t>kΩ</a:t>
+            </a:r>
+            <a:endParaRPr sz="1725" b="1" dirty="0">
+              <a:solidFill>
+                <a:srgbClr val="003366"/>
+              </a:solidFill>
+              <a:latin typeface="Lato"/>
+              <a:ea typeface="Lato"/>
+              <a:cs typeface="Lato"/>
+            </a:endParaRPr>
           </a:p>
         </p:txBody>
       </p:sp>
